--- a/Store Support/Projects/TDA Insights/TDA_WK11_Report.pptx
+++ b/Store Support/Projects/TDA Insights/TDA_WK11_Report.pptx
@@ -21,6 +21,7 @@
     <p:sldId id="269" r:id="rId20"/>
     <p:sldId id="270" r:id="rId21"/>
     <p:sldId id="271" r:id="rId22"/>
+    <p:sldId id="272" r:id="rId23"/>
   </p:sldIdLst>
   <p:sldSz cx="9144000" cy="6858000" type="screen4x3"/>
   <p:notesSz cx="6858000" cy="9144000"/>
@@ -3303,7 +3304,7 @@
         <p:spPr>
           <a:xfrm>
             <a:off x="0" y="0"/>
-            <a:ext cx="9144000" cy="6683273"/>
+            <a:ext cx="9144000" cy="6309554"/>
           </a:xfrm>
           <a:prstGeom prst="rect">
             <a:avLst/>
@@ -3345,7 +3346,7 @@
         <p:spPr>
           <a:xfrm>
             <a:off x="0" y="0"/>
-            <a:ext cx="9144000" cy="6785197"/>
+            <a:ext cx="9144000" cy="5358267"/>
           </a:xfrm>
           <a:prstGeom prst="rect">
             <a:avLst/>
@@ -3387,7 +3388,7 @@
         <p:spPr>
           <a:xfrm>
             <a:off x="0" y="0"/>
-            <a:ext cx="9144000" cy="6411477"/>
+            <a:ext cx="9144000" cy="6785197"/>
           </a:xfrm>
           <a:prstGeom prst="rect">
             <a:avLst/>
@@ -3429,7 +3430,7 @@
         <p:spPr>
           <a:xfrm>
             <a:off x="0" y="0"/>
-            <a:ext cx="9144000" cy="5765961"/>
+            <a:ext cx="9144000" cy="6411477"/>
           </a:xfrm>
           <a:prstGeom prst="rect">
             <a:avLst/>
@@ -3471,7 +3472,7 @@
         <p:spPr>
           <a:xfrm>
             <a:off x="0" y="0"/>
-            <a:ext cx="9144000" cy="6858000"/>
+            <a:ext cx="9144000" cy="5765961"/>
           </a:xfrm>
           <a:prstGeom prst="rect">
             <a:avLst/>
@@ -3555,6 +3556,48 @@
         <p:spPr>
           <a:xfrm>
             <a:off x="0" y="0"/>
+            <a:ext cx="9144000" cy="6858000"/>
+          </a:xfrm>
+          <a:prstGeom prst="rect">
+            <a:avLst/>
+          </a:prstGeom>
+        </p:spPr>
+      </p:pic>
+    </p:spTree>
+  </p:cSld>
+  <p:clrMapOvr>
+    <a:masterClrMapping/>
+  </p:clrMapOvr>
+</p:sld>
+</file>
+
+<file path=ppt/slides/slide17.xml><?xml version="1.0" encoding="utf-8"?>
+<p:sld xmlns:a="http://schemas.openxmlformats.org/drawingml/2006/main" xmlns:p="http://schemas.openxmlformats.org/presentationml/2006/main" xmlns:r="http://schemas.openxmlformats.org/officeDocument/2006/relationships">
+  <p:cSld>
+    <p:spTree>
+      <p:nvGrpSpPr>
+        <p:cNvPr id="1" name=""/>
+        <p:cNvGrpSpPr/>
+        <p:nvPr/>
+      </p:nvGrpSpPr>
+      <p:grpSpPr/>
+      <p:pic>
+        <p:nvPicPr>
+          <p:cNvPr id="2" name="Picture 1" descr="image.jpg"/>
+          <p:cNvPicPr>
+            <a:picLocks noChangeAspect="1"/>
+          </p:cNvPicPr>
+          <p:nvPr/>
+        </p:nvPicPr>
+        <p:blipFill>
+          <a:blip r:embed="rId2"/>
+          <a:stretch>
+            <a:fillRect/>
+          </a:stretch>
+        </p:blipFill>
+        <p:spPr>
+          <a:xfrm>
+            <a:off x="0" y="0"/>
             <a:ext cx="9144000" cy="6071732"/>
           </a:xfrm>
           <a:prstGeom prst="rect">
@@ -3597,7 +3640,7 @@
         <p:spPr>
           <a:xfrm>
             <a:off x="0" y="0"/>
-            <a:ext cx="9144000" cy="6547375"/>
+            <a:ext cx="9144000" cy="5867885"/>
           </a:xfrm>
           <a:prstGeom prst="rect">
             <a:avLst/>
@@ -3639,7 +3682,7 @@
         <p:spPr>
           <a:xfrm>
             <a:off x="0" y="0"/>
-            <a:ext cx="9144000" cy="6858000"/>
+            <a:ext cx="9144000" cy="6445452"/>
           </a:xfrm>
           <a:prstGeom prst="rect">
             <a:avLst/>
@@ -3723,7 +3766,7 @@
         <p:spPr>
           <a:xfrm>
             <a:off x="0" y="0"/>
-            <a:ext cx="9144000" cy="6858000"/>
+            <a:ext cx="9144000" cy="2572356"/>
           </a:xfrm>
           <a:prstGeom prst="rect">
             <a:avLst/>
@@ -3765,7 +3808,7 @@
         <p:spPr>
           <a:xfrm>
             <a:off x="0" y="0"/>
-            <a:ext cx="9144000" cy="5596089"/>
+            <a:ext cx="9144000" cy="6858000"/>
           </a:xfrm>
           <a:prstGeom prst="rect">
             <a:avLst/>
@@ -3807,7 +3850,7 @@
         <p:spPr>
           <a:xfrm>
             <a:off x="0" y="0"/>
-            <a:ext cx="9144000" cy="6858000"/>
+            <a:ext cx="9144000" cy="6411477"/>
           </a:xfrm>
           <a:prstGeom prst="rect">
             <a:avLst/>
@@ -3849,7 +3892,7 @@
         <p:spPr>
           <a:xfrm>
             <a:off x="0" y="0"/>
-            <a:ext cx="9144000" cy="6275579"/>
+            <a:ext cx="9144000" cy="6858000"/>
           </a:xfrm>
           <a:prstGeom prst="rect">
             <a:avLst/>

--- a/Store Support/Projects/TDA Insights/TDA_WK11_Report.pptx
+++ b/Store Support/Projects/TDA Insights/TDA_WK11_Report.pptx
@@ -22,6 +22,7 @@
     <p:sldId id="270" r:id="rId21"/>
     <p:sldId id="271" r:id="rId22"/>
     <p:sldId id="272" r:id="rId23"/>
+    <p:sldId id="273" r:id="rId24"/>
   </p:sldIdLst>
   <p:sldSz cx="9144000" cy="6858000" type="screen4x3"/>
   <p:notesSz cx="6858000" cy="9144000"/>
@@ -3304,7 +3305,7 @@
         <p:spPr>
           <a:xfrm>
             <a:off x="0" y="0"/>
-            <a:ext cx="9144000" cy="6309554"/>
+            <a:ext cx="9144000" cy="6445452"/>
           </a:xfrm>
           <a:prstGeom prst="rect">
             <a:avLst/>
@@ -3346,7 +3347,7 @@
         <p:spPr>
           <a:xfrm>
             <a:off x="0" y="0"/>
-            <a:ext cx="9144000" cy="5358267"/>
+            <a:ext cx="9144000" cy="6858000"/>
           </a:xfrm>
           <a:prstGeom prst="rect">
             <a:avLst/>
@@ -3388,7 +3389,7 @@
         <p:spPr>
           <a:xfrm>
             <a:off x="0" y="0"/>
-            <a:ext cx="9144000" cy="6785197"/>
+            <a:ext cx="9144000" cy="6858000"/>
           </a:xfrm>
           <a:prstGeom prst="rect">
             <a:avLst/>
@@ -3430,7 +3431,7 @@
         <p:spPr>
           <a:xfrm>
             <a:off x="0" y="0"/>
-            <a:ext cx="9144000" cy="6411477"/>
+            <a:ext cx="9144000" cy="3251847"/>
           </a:xfrm>
           <a:prstGeom prst="rect">
             <a:avLst/>
@@ -3472,7 +3473,7 @@
         <p:spPr>
           <a:xfrm>
             <a:off x="0" y="0"/>
-            <a:ext cx="9144000" cy="5765961"/>
+            <a:ext cx="9144000" cy="6858000"/>
           </a:xfrm>
           <a:prstGeom prst="rect">
             <a:avLst/>
@@ -3514,7 +3515,7 @@
         <p:spPr>
           <a:xfrm>
             <a:off x="0" y="0"/>
-            <a:ext cx="9144000" cy="6858000"/>
+            <a:ext cx="9144000" cy="3421719"/>
           </a:xfrm>
           <a:prstGeom prst="rect">
             <a:avLst/>
@@ -3598,7 +3599,49 @@
         <p:spPr>
           <a:xfrm>
             <a:off x="0" y="0"/>
-            <a:ext cx="9144000" cy="6071732"/>
+            <a:ext cx="9144000" cy="6858000"/>
+          </a:xfrm>
+          <a:prstGeom prst="rect">
+            <a:avLst/>
+          </a:prstGeom>
+        </p:spPr>
+      </p:pic>
+    </p:spTree>
+  </p:cSld>
+  <p:clrMapOvr>
+    <a:masterClrMapping/>
+  </p:clrMapOvr>
+</p:sld>
+</file>
+
+<file path=ppt/slides/slide18.xml><?xml version="1.0" encoding="utf-8"?>
+<p:sld xmlns:a="http://schemas.openxmlformats.org/drawingml/2006/main" xmlns:p="http://schemas.openxmlformats.org/presentationml/2006/main" xmlns:r="http://schemas.openxmlformats.org/officeDocument/2006/relationships">
+  <p:cSld>
+    <p:spTree>
+      <p:nvGrpSpPr>
+        <p:cNvPr id="1" name=""/>
+        <p:cNvGrpSpPr/>
+        <p:nvPr/>
+      </p:nvGrpSpPr>
+      <p:grpSpPr/>
+      <p:pic>
+        <p:nvPicPr>
+          <p:cNvPr id="2" name="Picture 1" descr="image.jpg"/>
+          <p:cNvPicPr>
+            <a:picLocks noChangeAspect="1"/>
+          </p:cNvPicPr>
+          <p:nvPr/>
+        </p:nvPicPr>
+        <p:blipFill>
+          <a:blip r:embed="rId2"/>
+          <a:stretch>
+            <a:fillRect/>
+          </a:stretch>
+        </p:blipFill>
+        <p:spPr>
+          <a:xfrm>
+            <a:off x="0" y="0"/>
+            <a:ext cx="9144000" cy="1689019"/>
           </a:xfrm>
           <a:prstGeom prst="rect">
             <a:avLst/>
@@ -3682,7 +3725,7 @@
         <p:spPr>
           <a:xfrm>
             <a:off x="0" y="0"/>
-            <a:ext cx="9144000" cy="6445452"/>
+            <a:ext cx="9144000" cy="5630063"/>
           </a:xfrm>
           <a:prstGeom prst="rect">
             <a:avLst/>
@@ -3766,7 +3809,7 @@
         <p:spPr>
           <a:xfrm>
             <a:off x="0" y="0"/>
-            <a:ext cx="9144000" cy="2572356"/>
+            <a:ext cx="9144000" cy="1596802"/>
           </a:xfrm>
           <a:prstGeom prst="rect">
             <a:avLst/>
@@ -3850,7 +3893,7 @@
         <p:spPr>
           <a:xfrm>
             <a:off x="0" y="0"/>
-            <a:ext cx="9144000" cy="6411477"/>
+            <a:ext cx="9144000" cy="5765961"/>
           </a:xfrm>
           <a:prstGeom prst="rect">
             <a:avLst/>

--- a/Store Support/Projects/TDA Insights/TDA_WK11_Report.pptx
+++ b/Store Support/Projects/TDA Insights/TDA_WK11_Report.pptx
@@ -3431,7 +3431,7 @@
         <p:spPr>
           <a:xfrm>
             <a:off x="0" y="0"/>
-            <a:ext cx="9144000" cy="3251847"/>
+            <a:ext cx="9144000" cy="2742229"/>
           </a:xfrm>
           <a:prstGeom prst="rect">
             <a:avLst/>
@@ -3515,7 +3515,7 @@
         <p:spPr>
           <a:xfrm>
             <a:off x="0" y="0"/>
-            <a:ext cx="9144000" cy="3421719"/>
+            <a:ext cx="9144000" cy="4610828"/>
           </a:xfrm>
           <a:prstGeom prst="rect">
             <a:avLst/>
@@ -3893,7 +3893,7 @@
         <p:spPr>
           <a:xfrm>
             <a:off x="0" y="0"/>
-            <a:ext cx="9144000" cy="5765961"/>
+            <a:ext cx="9144000" cy="6037757"/>
           </a:xfrm>
           <a:prstGeom prst="rect">
             <a:avLst/>
